--- a/livro_ia_educacao/saida/pptx/Cap08_slides.pptx
+++ b/livro_ia_educacao/saida/pptx/Cap08_slides.pptx
@@ -9183,11 +9183,11 @@
         <p:spPr>
           <a:xfrm>
             <a:off x="548640" y="1417320"/>
-            <a:ext cx="11064240" cy="762000"/>
+            <a:ext cx="11064240" cy="682752"/>
           </a:xfrm>
           <a:prstGeom prst="roundRect">
             <a:avLst>
-              <a:gd name="adj" fmla="val 14400"/>
+              <a:gd name="adj" fmla="val 16071"/>
             </a:avLst>
           </a:prstGeom>
           <a:solidFill>
@@ -9214,7 +9214,7 @@
         <p:spPr>
           <a:xfrm>
             <a:off x="731520" y="1417320"/>
-            <a:ext cx="548640" cy="762000"/>
+            <a:ext cx="548640" cy="682752"/>
           </a:xfrm>
           <a:prstGeom prst="rect">
             <a:avLst/>
@@ -9250,7 +9250,7 @@
         <p:spPr>
           <a:xfrm>
             <a:off x="1463040" y="1417320"/>
-            <a:ext cx="9966960" cy="762000"/>
+            <a:ext cx="9966960" cy="682752"/>
           </a:xfrm>
           <a:prstGeom prst="rect">
             <a:avLst/>
@@ -9285,12 +9285,12 @@
         </p:nvSpPr>
         <p:spPr>
           <a:xfrm>
-            <a:off x="548640" y="2289048"/>
-            <a:ext cx="11064240" cy="762000"/>
+            <a:off x="548640" y="2209800"/>
+            <a:ext cx="11064240" cy="682752"/>
           </a:xfrm>
           <a:prstGeom prst="roundRect">
             <a:avLst>
-              <a:gd name="adj" fmla="val 14400"/>
+              <a:gd name="adj" fmla="val 16071"/>
             </a:avLst>
           </a:prstGeom>
           <a:solidFill>
@@ -9316,8 +9316,8 @@
         </p:nvSpPr>
         <p:spPr>
           <a:xfrm>
-            <a:off x="731520" y="2289048"/>
-            <a:ext cx="548640" cy="762000"/>
+            <a:off x="731520" y="2209800"/>
+            <a:ext cx="548640" cy="682752"/>
           </a:xfrm>
           <a:prstGeom prst="rect">
             <a:avLst/>
@@ -9352,8 +9352,8 @@
         </p:nvSpPr>
         <p:spPr>
           <a:xfrm>
-            <a:off x="1463040" y="2289048"/>
-            <a:ext cx="9966960" cy="762000"/>
+            <a:off x="1463040" y="2209800"/>
+            <a:ext cx="9966960" cy="682752"/>
           </a:xfrm>
           <a:prstGeom prst="rect">
             <a:avLst/>
@@ -9388,12 +9388,12 @@
         </p:nvSpPr>
         <p:spPr>
           <a:xfrm>
-            <a:off x="548640" y="3160776"/>
-            <a:ext cx="11064240" cy="762000"/>
+            <a:off x="548640" y="3002280"/>
+            <a:ext cx="11064240" cy="682752"/>
           </a:xfrm>
           <a:prstGeom prst="roundRect">
             <a:avLst>
-              <a:gd name="adj" fmla="val 14400"/>
+              <a:gd name="adj" fmla="val 16071"/>
             </a:avLst>
           </a:prstGeom>
           <a:solidFill>
@@ -9419,8 +9419,8 @@
         </p:nvSpPr>
         <p:spPr>
           <a:xfrm>
-            <a:off x="731520" y="3160776"/>
-            <a:ext cx="548640" cy="762000"/>
+            <a:off x="731520" y="3002280"/>
+            <a:ext cx="548640" cy="682752"/>
           </a:xfrm>
           <a:prstGeom prst="rect">
             <a:avLst/>
@@ -9455,8 +9455,8 @@
         </p:nvSpPr>
         <p:spPr>
           <a:xfrm>
-            <a:off x="1463040" y="3160776"/>
-            <a:ext cx="9966960" cy="762000"/>
+            <a:off x="1463040" y="3002280"/>
+            <a:ext cx="9966960" cy="682752"/>
           </a:xfrm>
           <a:prstGeom prst="rect">
             <a:avLst/>
@@ -9491,12 +9491,12 @@
         </p:nvSpPr>
         <p:spPr>
           <a:xfrm>
-            <a:off x="548640" y="4032504"/>
-            <a:ext cx="11064240" cy="762000"/>
+            <a:off x="548640" y="3794760"/>
+            <a:ext cx="11064240" cy="682752"/>
           </a:xfrm>
           <a:prstGeom prst="roundRect">
             <a:avLst>
-              <a:gd name="adj" fmla="val 14400"/>
+              <a:gd name="adj" fmla="val 16071"/>
             </a:avLst>
           </a:prstGeom>
           <a:solidFill>
@@ -9522,8 +9522,8 @@
         </p:nvSpPr>
         <p:spPr>
           <a:xfrm>
-            <a:off x="731520" y="4032504"/>
-            <a:ext cx="548640" cy="762000"/>
+            <a:off x="731520" y="3794760"/>
+            <a:ext cx="548640" cy="682752"/>
           </a:xfrm>
           <a:prstGeom prst="rect">
             <a:avLst/>
@@ -9558,8 +9558,8 @@
         </p:nvSpPr>
         <p:spPr>
           <a:xfrm>
-            <a:off x="1463040" y="4032504"/>
-            <a:ext cx="9966960" cy="762000"/>
+            <a:off x="1463040" y="3794760"/>
+            <a:ext cx="9966960" cy="682752"/>
           </a:xfrm>
           <a:prstGeom prst="rect">
             <a:avLst/>
@@ -9594,12 +9594,12 @@
         </p:nvSpPr>
         <p:spPr>
           <a:xfrm>
-            <a:off x="548640" y="4904232"/>
-            <a:ext cx="11064240" cy="762000"/>
+            <a:off x="548640" y="4587240"/>
+            <a:ext cx="11064240" cy="682752"/>
           </a:xfrm>
           <a:prstGeom prst="roundRect">
             <a:avLst>
-              <a:gd name="adj" fmla="val 14400"/>
+              <a:gd name="adj" fmla="val 16071"/>
             </a:avLst>
           </a:prstGeom>
           <a:solidFill>
@@ -9625,8 +9625,8 @@
         </p:nvSpPr>
         <p:spPr>
           <a:xfrm>
-            <a:off x="731520" y="4904232"/>
-            <a:ext cx="548640" cy="762000"/>
+            <a:off x="731520" y="4587240"/>
+            <a:ext cx="548640" cy="682752"/>
           </a:xfrm>
           <a:prstGeom prst="rect">
             <a:avLst/>
@@ -9661,8 +9661,8 @@
         </p:nvSpPr>
         <p:spPr>
           <a:xfrm>
-            <a:off x="1463040" y="4904232"/>
-            <a:ext cx="9966960" cy="762000"/>
+            <a:off x="1463040" y="4587240"/>
+            <a:ext cx="9966960" cy="682752"/>
           </a:xfrm>
           <a:prstGeom prst="rect">
             <a:avLst/>
@@ -9697,12 +9697,12 @@
         </p:nvSpPr>
         <p:spPr>
           <a:xfrm>
-            <a:off x="548640" y="5775960"/>
-            <a:ext cx="11064240" cy="762000"/>
+            <a:off x="548640" y="5379720"/>
+            <a:ext cx="11064240" cy="682752"/>
           </a:xfrm>
           <a:prstGeom prst="roundRect">
             <a:avLst>
-              <a:gd name="adj" fmla="val 14400"/>
+              <a:gd name="adj" fmla="val 16071"/>
             </a:avLst>
           </a:prstGeom>
           <a:solidFill>
@@ -9728,8 +9728,8 @@
         </p:nvSpPr>
         <p:spPr>
           <a:xfrm>
-            <a:off x="731520" y="5775960"/>
-            <a:ext cx="548640" cy="762000"/>
+            <a:off x="731520" y="5379720"/>
+            <a:ext cx="548640" cy="682752"/>
           </a:xfrm>
           <a:prstGeom prst="rect">
             <a:avLst/>
@@ -9764,8 +9764,8 @@
         </p:nvSpPr>
         <p:spPr>
           <a:xfrm>
-            <a:off x="1463040" y="5775960"/>
-            <a:ext cx="9966960" cy="762000"/>
+            <a:off x="1463040" y="5379720"/>
+            <a:ext cx="9966960" cy="682752"/>
           </a:xfrm>
           <a:prstGeom prst="rect">
             <a:avLst/>
